--- a/docs/pptx/carbo/ritu-carbo-linsubhr-sens-death.pptx
+++ b/docs/pptx/carbo/ritu-carbo-linsubhr-sens-death.pptx
@@ -2443,7 +2443,7 @@
           </p:nvSpPr>
           <p:spPr>
             <a:xfrm>
-              <a:off x="868706" y="2073503"/>
+              <a:off x="869934" y="2073503"/>
               <a:ext cx="0" cy="3649639"/>
             </a:xfrm>
             <a:custGeom>
@@ -2486,7 +2486,7 @@
           </p:nvSpPr>
           <p:spPr>
             <a:xfrm>
-              <a:off x="2695888" y="2073503"/>
+              <a:off x="2693907" y="2073503"/>
               <a:ext cx="0" cy="3649639"/>
             </a:xfrm>
             <a:custGeom>
@@ -2529,7 +2529,7 @@
           </p:nvSpPr>
           <p:spPr>
             <a:xfrm>
-              <a:off x="4523069" y="2073503"/>
+              <a:off x="4517879" y="2073503"/>
               <a:ext cx="0" cy="3649639"/>
             </a:xfrm>
             <a:custGeom>
@@ -2572,7 +2572,7 @@
           </p:nvSpPr>
           <p:spPr>
             <a:xfrm>
-              <a:off x="6350251" y="2073503"/>
+              <a:off x="6341852" y="2073503"/>
               <a:ext cx="0" cy="3649639"/>
             </a:xfrm>
             <a:custGeom>
@@ -2615,7 +2615,7 @@
           </p:nvSpPr>
           <p:spPr>
             <a:xfrm>
-              <a:off x="8177433" y="2073503"/>
+              <a:off x="8165824" y="2073503"/>
               <a:ext cx="0" cy="3649639"/>
             </a:xfrm>
             <a:custGeom>
@@ -2873,7 +2873,7 @@
           </p:nvSpPr>
           <p:spPr>
             <a:xfrm>
-              <a:off x="1782297" y="2073503"/>
+              <a:off x="1781921" y="2073503"/>
               <a:ext cx="0" cy="3649639"/>
             </a:xfrm>
             <a:custGeom>
@@ -2916,7 +2916,7 @@
           </p:nvSpPr>
           <p:spPr>
             <a:xfrm>
-              <a:off x="3609478" y="2073503"/>
+              <a:off x="3605893" y="2073503"/>
               <a:ext cx="0" cy="3649639"/>
             </a:xfrm>
             <a:custGeom>
@@ -2959,7 +2959,7 @@
           </p:nvSpPr>
           <p:spPr>
             <a:xfrm>
-              <a:off x="5436660" y="2073503"/>
+              <a:off x="5429866" y="2073503"/>
               <a:ext cx="0" cy="3649639"/>
             </a:xfrm>
             <a:custGeom>
@@ -3002,7 +3002,7 @@
           </p:nvSpPr>
           <p:spPr>
             <a:xfrm>
-              <a:off x="7263842" y="2073503"/>
+              <a:off x="7253838" y="2073503"/>
               <a:ext cx="0" cy="3649639"/>
             </a:xfrm>
             <a:custGeom>
@@ -4326,195 +4326,282 @@
           </p:nvSpPr>
           <p:spPr>
             <a:xfrm>
-              <a:off x="3969707" y="2073503"/>
-              <a:ext cx="4292972" cy="3483424"/>
+              <a:off x="1916457" y="2073503"/>
+              <a:ext cx="6346221" cy="3359462"/>
             </a:xfrm>
             <a:custGeom>
               <a:avLst/>
               <a:pathLst>
-                <a:path w="4292972" h="3483424">
+                <a:path w="6346221" h="3359462">
                   <a:moveTo>
                     <a:pt x="0" y="0"/>
                   </a:moveTo>
                   <a:lnTo>
-                    <a:pt x="67243" y="473614"/>
-                  </a:lnTo>
-                  <a:lnTo>
-                    <a:pt x="138865" y="905665"/>
-                  </a:lnTo>
-                  <a:lnTo>
-                    <a:pt x="210488" y="1275704"/>
-                  </a:lnTo>
-                  <a:lnTo>
-                    <a:pt x="282110" y="1592630"/>
-                  </a:lnTo>
-                  <a:lnTo>
-                    <a:pt x="353733" y="1864066"/>
-                  </a:lnTo>
-                  <a:lnTo>
-                    <a:pt x="425356" y="2096543"/>
-                  </a:lnTo>
-                  <a:lnTo>
-                    <a:pt x="496978" y="2295652"/>
-                  </a:lnTo>
-                  <a:lnTo>
-                    <a:pt x="568601" y="2466182"/>
-                  </a:lnTo>
-                  <a:lnTo>
-                    <a:pt x="640223" y="2612235"/>
-                  </a:lnTo>
-                  <a:lnTo>
-                    <a:pt x="711846" y="2737325"/>
-                  </a:lnTo>
-                  <a:lnTo>
-                    <a:pt x="783468" y="2844461"/>
-                  </a:lnTo>
-                  <a:lnTo>
-                    <a:pt x="855091" y="2936219"/>
-                  </a:lnTo>
-                  <a:lnTo>
-                    <a:pt x="926713" y="3014807"/>
-                  </a:lnTo>
-                  <a:lnTo>
-                    <a:pt x="998336" y="3082115"/>
-                  </a:lnTo>
-                  <a:lnTo>
-                    <a:pt x="1069958" y="3139762"/>
-                  </a:lnTo>
-                  <a:lnTo>
-                    <a:pt x="1141581" y="3189135"/>
-                  </a:lnTo>
-                  <a:lnTo>
-                    <a:pt x="1213203" y="3231421"/>
-                  </a:lnTo>
-                  <a:lnTo>
-                    <a:pt x="1284826" y="3267638"/>
-                  </a:lnTo>
-                  <a:lnTo>
-                    <a:pt x="1356448" y="3298657"/>
-                  </a:lnTo>
-                  <a:lnTo>
-                    <a:pt x="1428071" y="3325223"/>
-                  </a:lnTo>
-                  <a:lnTo>
-                    <a:pt x="1499693" y="3347976"/>
-                  </a:lnTo>
-                  <a:lnTo>
-                    <a:pt x="1571316" y="3367464"/>
-                  </a:lnTo>
-                  <a:lnTo>
-                    <a:pt x="1642938" y="3384154"/>
-                  </a:lnTo>
-                  <a:lnTo>
-                    <a:pt x="1714561" y="3398449"/>
-                  </a:lnTo>
-                  <a:lnTo>
-                    <a:pt x="1786184" y="3410692"/>
-                  </a:lnTo>
-                  <a:lnTo>
-                    <a:pt x="1857806" y="3421178"/>
-                  </a:lnTo>
-                  <a:lnTo>
-                    <a:pt x="1929429" y="3430158"/>
-                  </a:lnTo>
-                  <a:lnTo>
-                    <a:pt x="2001051" y="3437850"/>
-                  </a:lnTo>
-                  <a:lnTo>
-                    <a:pt x="2072674" y="3444437"/>
-                  </a:lnTo>
-                  <a:lnTo>
-                    <a:pt x="2144296" y="3450080"/>
-                  </a:lnTo>
-                  <a:lnTo>
-                    <a:pt x="2215919" y="3454912"/>
-                  </a:lnTo>
-                  <a:lnTo>
-                    <a:pt x="2287541" y="3459051"/>
-                  </a:lnTo>
-                  <a:lnTo>
-                    <a:pt x="2359164" y="3462595"/>
-                  </a:lnTo>
-                  <a:lnTo>
-                    <a:pt x="2430786" y="3465631"/>
-                  </a:lnTo>
-                  <a:lnTo>
-                    <a:pt x="2502409" y="3468231"/>
-                  </a:lnTo>
-                  <a:lnTo>
-                    <a:pt x="2574031" y="3470458"/>
-                  </a:lnTo>
-                  <a:lnTo>
-                    <a:pt x="2645654" y="3472365"/>
-                  </a:lnTo>
-                  <a:lnTo>
-                    <a:pt x="2717276" y="3473999"/>
-                  </a:lnTo>
-                  <a:lnTo>
-                    <a:pt x="2788899" y="3475398"/>
-                  </a:lnTo>
-                  <a:lnTo>
-                    <a:pt x="2860521" y="3476596"/>
-                  </a:lnTo>
-                  <a:lnTo>
-                    <a:pt x="2932144" y="3477623"/>
-                  </a:lnTo>
-                  <a:lnTo>
-                    <a:pt x="3003766" y="3478502"/>
-                  </a:lnTo>
-                  <a:lnTo>
-                    <a:pt x="3075389" y="3479254"/>
-                  </a:lnTo>
-                  <a:lnTo>
-                    <a:pt x="3147012" y="3479899"/>
-                  </a:lnTo>
-                  <a:lnTo>
-                    <a:pt x="3218634" y="3480451"/>
-                  </a:lnTo>
-                  <a:lnTo>
-                    <a:pt x="3290257" y="3480924"/>
-                  </a:lnTo>
-                  <a:lnTo>
-                    <a:pt x="3361879" y="3481329"/>
-                  </a:lnTo>
-                  <a:lnTo>
-                    <a:pt x="3433502" y="3481676"/>
-                  </a:lnTo>
-                  <a:lnTo>
-                    <a:pt x="3505124" y="3481973"/>
-                  </a:lnTo>
-                  <a:lnTo>
-                    <a:pt x="3576747" y="3482228"/>
-                  </a:lnTo>
-                  <a:lnTo>
-                    <a:pt x="3648369" y="3482446"/>
-                  </a:lnTo>
-                  <a:lnTo>
-                    <a:pt x="3719992" y="3482633"/>
-                  </a:lnTo>
-                  <a:lnTo>
-                    <a:pt x="3791614" y="3482792"/>
-                  </a:lnTo>
-                  <a:lnTo>
-                    <a:pt x="3863237" y="3482929"/>
-                  </a:lnTo>
-                  <a:lnTo>
-                    <a:pt x="3934859" y="3483047"/>
-                  </a:lnTo>
-                  <a:lnTo>
-                    <a:pt x="4006482" y="3483147"/>
-                  </a:lnTo>
-                  <a:lnTo>
-                    <a:pt x="4078104" y="3483233"/>
-                  </a:lnTo>
-                  <a:lnTo>
-                    <a:pt x="4149727" y="3483307"/>
-                  </a:lnTo>
-                  <a:lnTo>
-                    <a:pt x="4221349" y="3483370"/>
-                  </a:lnTo>
-                  <a:lnTo>
-                    <a:pt x="4292972" y="3483424"/>
+                    <a:pt x="43439" y="79155"/>
+                  </a:lnTo>
+                  <a:lnTo>
+                    <a:pt x="115062" y="204847"/>
+                  </a:lnTo>
+                  <a:lnTo>
+                    <a:pt x="186684" y="325898"/>
+                  </a:lnTo>
+                  <a:lnTo>
+                    <a:pt x="258307" y="442481"/>
+                  </a:lnTo>
+                  <a:lnTo>
+                    <a:pt x="329929" y="554760"/>
+                  </a:lnTo>
+                  <a:lnTo>
+                    <a:pt x="401552" y="662893"/>
+                  </a:lnTo>
+                  <a:lnTo>
+                    <a:pt x="473174" y="767034"/>
+                  </a:lnTo>
+                  <a:lnTo>
+                    <a:pt x="544797" y="867331"/>
+                  </a:lnTo>
+                  <a:lnTo>
+                    <a:pt x="616419" y="963925"/>
+                  </a:lnTo>
+                  <a:lnTo>
+                    <a:pt x="688042" y="1056952"/>
+                  </a:lnTo>
+                  <a:lnTo>
+                    <a:pt x="759664" y="1146546"/>
+                  </a:lnTo>
+                  <a:lnTo>
+                    <a:pt x="831287" y="1232831"/>
+                  </a:lnTo>
+                  <a:lnTo>
+                    <a:pt x="902909" y="1315932"/>
+                  </a:lnTo>
+                  <a:lnTo>
+                    <a:pt x="974532" y="1395964"/>
+                  </a:lnTo>
+                  <a:lnTo>
+                    <a:pt x="1046154" y="1473041"/>
+                  </a:lnTo>
+                  <a:lnTo>
+                    <a:pt x="1117777" y="1547273"/>
+                  </a:lnTo>
+                  <a:lnTo>
+                    <a:pt x="1189399" y="1618765"/>
+                  </a:lnTo>
+                  <a:lnTo>
+                    <a:pt x="1261022" y="1687617"/>
+                  </a:lnTo>
+                  <a:lnTo>
+                    <a:pt x="1332645" y="1753927"/>
+                  </a:lnTo>
+                  <a:lnTo>
+                    <a:pt x="1404267" y="1817789"/>
+                  </a:lnTo>
+                  <a:lnTo>
+                    <a:pt x="1475890" y="1879294"/>
+                  </a:lnTo>
+                  <a:lnTo>
+                    <a:pt x="1547512" y="1938527"/>
+                  </a:lnTo>
+                  <a:lnTo>
+                    <a:pt x="1619135" y="1995574"/>
+                  </a:lnTo>
+                  <a:lnTo>
+                    <a:pt x="1690757" y="2050515"/>
+                  </a:lnTo>
+                  <a:lnTo>
+                    <a:pt x="1762380" y="2103428"/>
+                  </a:lnTo>
+                  <a:lnTo>
+                    <a:pt x="1834002" y="2154387"/>
+                  </a:lnTo>
+                  <a:lnTo>
+                    <a:pt x="1905625" y="2203465"/>
+                  </a:lnTo>
+                  <a:lnTo>
+                    <a:pt x="1977247" y="2250731"/>
+                  </a:lnTo>
+                  <a:lnTo>
+                    <a:pt x="2048870" y="2296252"/>
+                  </a:lnTo>
+                  <a:lnTo>
+                    <a:pt x="2120492" y="2340092"/>
+                  </a:lnTo>
+                  <a:lnTo>
+                    <a:pt x="2192115" y="2382314"/>
+                  </a:lnTo>
+                  <a:lnTo>
+                    <a:pt x="2263737" y="2422977"/>
+                  </a:lnTo>
+                  <a:lnTo>
+                    <a:pt x="2335360" y="2462139"/>
+                  </a:lnTo>
+                  <a:lnTo>
+                    <a:pt x="2406982" y="2499855"/>
+                  </a:lnTo>
+                  <a:lnTo>
+                    <a:pt x="2478605" y="2536179"/>
+                  </a:lnTo>
+                  <a:lnTo>
+                    <a:pt x="2550227" y="2571161"/>
+                  </a:lnTo>
+                  <a:lnTo>
+                    <a:pt x="2621850" y="2604852"/>
+                  </a:lnTo>
+                  <a:lnTo>
+                    <a:pt x="2693472" y="2637300"/>
+                  </a:lnTo>
+                  <a:lnTo>
+                    <a:pt x="2765095" y="2668549"/>
+                  </a:lnTo>
+                  <a:lnTo>
+                    <a:pt x="2836718" y="2698645"/>
+                  </a:lnTo>
+                  <a:lnTo>
+                    <a:pt x="2908340" y="2727630"/>
+                  </a:lnTo>
+                  <a:lnTo>
+                    <a:pt x="2979963" y="2755544"/>
+                  </a:lnTo>
+                  <a:lnTo>
+                    <a:pt x="3051585" y="2782428"/>
+                  </a:lnTo>
+                  <a:lnTo>
+                    <a:pt x="3123208" y="2808320"/>
+                  </a:lnTo>
+                  <a:lnTo>
+                    <a:pt x="3194830" y="2833255"/>
+                  </a:lnTo>
+                  <a:lnTo>
+                    <a:pt x="3266453" y="2857270"/>
+                  </a:lnTo>
+                  <a:lnTo>
+                    <a:pt x="3338075" y="2880399"/>
+                  </a:lnTo>
+                  <a:lnTo>
+                    <a:pt x="3409698" y="2902674"/>
+                  </a:lnTo>
+                  <a:lnTo>
+                    <a:pt x="3481320" y="2924126"/>
+                  </a:lnTo>
+                  <a:lnTo>
+                    <a:pt x="3552943" y="2944786"/>
+                  </a:lnTo>
+                  <a:lnTo>
+                    <a:pt x="3624565" y="2964684"/>
+                  </a:lnTo>
+                  <a:lnTo>
+                    <a:pt x="3696188" y="2983847"/>
+                  </a:lnTo>
+                  <a:lnTo>
+                    <a:pt x="3767810" y="3002302"/>
+                  </a:lnTo>
+                  <a:lnTo>
+                    <a:pt x="3839433" y="3020076"/>
+                  </a:lnTo>
+                  <a:lnTo>
+                    <a:pt x="3911055" y="3037194"/>
+                  </a:lnTo>
+                  <a:lnTo>
+                    <a:pt x="3982678" y="3053680"/>
+                  </a:lnTo>
+                  <a:lnTo>
+                    <a:pt x="4054300" y="3069557"/>
+                  </a:lnTo>
+                  <a:lnTo>
+                    <a:pt x="4125923" y="3084849"/>
+                  </a:lnTo>
+                  <a:lnTo>
+                    <a:pt x="4197546" y="3099575"/>
+                  </a:lnTo>
+                  <a:lnTo>
+                    <a:pt x="4269168" y="3113758"/>
+                  </a:lnTo>
+                  <a:lnTo>
+                    <a:pt x="4340791" y="3127418"/>
+                  </a:lnTo>
+                  <a:lnTo>
+                    <a:pt x="4412413" y="3140573"/>
+                  </a:lnTo>
+                  <a:lnTo>
+                    <a:pt x="4484036" y="3153242"/>
+                  </a:lnTo>
+                  <a:lnTo>
+                    <a:pt x="4555658" y="3165444"/>
+                  </a:lnTo>
+                  <a:lnTo>
+                    <a:pt x="4627281" y="3177195"/>
+                  </a:lnTo>
+                  <a:lnTo>
+                    <a:pt x="4698903" y="3188512"/>
+                  </a:lnTo>
+                  <a:lnTo>
+                    <a:pt x="4770526" y="3199412"/>
+                  </a:lnTo>
+                  <a:lnTo>
+                    <a:pt x="4842148" y="3209909"/>
+                  </a:lnTo>
+                  <a:lnTo>
+                    <a:pt x="4913771" y="3220019"/>
+                  </a:lnTo>
+                  <a:lnTo>
+                    <a:pt x="4985393" y="3229755"/>
+                  </a:lnTo>
+                  <a:lnTo>
+                    <a:pt x="5057016" y="3239132"/>
+                  </a:lnTo>
+                  <a:lnTo>
+                    <a:pt x="5128638" y="3248163"/>
+                  </a:lnTo>
+                  <a:lnTo>
+                    <a:pt x="5200261" y="3256860"/>
+                  </a:lnTo>
+                  <a:lnTo>
+                    <a:pt x="5271883" y="3265237"/>
+                  </a:lnTo>
+                  <a:lnTo>
+                    <a:pt x="5343506" y="3273304"/>
+                  </a:lnTo>
+                  <a:lnTo>
+                    <a:pt x="5415128" y="3281073"/>
+                  </a:lnTo>
+                  <a:lnTo>
+                    <a:pt x="5486751" y="3288555"/>
+                  </a:lnTo>
+                  <a:lnTo>
+                    <a:pt x="5558374" y="3295761"/>
+                  </a:lnTo>
+                  <a:lnTo>
+                    <a:pt x="5629996" y="3302701"/>
+                  </a:lnTo>
+                  <a:lnTo>
+                    <a:pt x="5701619" y="3309385"/>
+                  </a:lnTo>
+                  <a:lnTo>
+                    <a:pt x="5773241" y="3315822"/>
+                  </a:lnTo>
+                  <a:lnTo>
+                    <a:pt x="5844864" y="3322022"/>
+                  </a:lnTo>
+                  <a:lnTo>
+                    <a:pt x="5916486" y="3327992"/>
+                  </a:lnTo>
+                  <a:lnTo>
+                    <a:pt x="5988109" y="3333743"/>
+                  </a:lnTo>
+                  <a:lnTo>
+                    <a:pt x="6059731" y="3339281"/>
+                  </a:lnTo>
+                  <a:lnTo>
+                    <a:pt x="6131354" y="3344614"/>
+                  </a:lnTo>
+                  <a:lnTo>
+                    <a:pt x="6202976" y="3349751"/>
+                  </a:lnTo>
+                  <a:lnTo>
+                    <a:pt x="6274599" y="3354697"/>
+                  </a:lnTo>
+                  <a:lnTo>
+                    <a:pt x="6346221" y="3359462"/>
                   </a:lnTo>
                 </a:path>
               </a:pathLst>
@@ -4586,7 +4673,7 @@
           </p:nvSpPr>
           <p:spPr>
             <a:xfrm>
-              <a:off x="4632789" y="2073503"/>
+              <a:off x="4648520" y="2073503"/>
               <a:ext cx="0" cy="3649639"/>
             </a:xfrm>
             <a:custGeom>
@@ -4629,7 +4716,7 @@
           </p:nvSpPr>
           <p:spPr>
             <a:xfrm>
-              <a:off x="3519238" y="2073503"/>
+              <a:off x="3510041" y="2073503"/>
               <a:ext cx="0" cy="3649639"/>
             </a:xfrm>
             <a:custGeom>
@@ -4672,7 +4759,7 @@
           </p:nvSpPr>
           <p:spPr>
             <a:xfrm>
-              <a:off x="5667105" y="2073503"/>
+              <a:off x="5671562" y="2073503"/>
               <a:ext cx="0" cy="3649639"/>
             </a:xfrm>
             <a:custGeom>
@@ -4945,7 +5032,7 @@
           </p:nvSpPr>
           <p:spPr>
             <a:xfrm>
-              <a:off x="1701509" y="5785772"/>
+              <a:off x="1701133" y="5785772"/>
               <a:ext cx="161574" cy="80101"/>
             </a:xfrm>
             <a:prstGeom prst="rect">
@@ -4991,7 +5078,7 @@
           </p:nvSpPr>
           <p:spPr>
             <a:xfrm>
-              <a:off x="3528691" y="5785772"/>
+              <a:off x="3525106" y="5785772"/>
               <a:ext cx="161574" cy="80101"/>
             </a:xfrm>
             <a:prstGeom prst="rect">
@@ -5037,7 +5124,7 @@
           </p:nvSpPr>
           <p:spPr>
             <a:xfrm>
-              <a:off x="5405571" y="5785772"/>
+              <a:off x="5398776" y="5785772"/>
               <a:ext cx="62179" cy="80101"/>
             </a:xfrm>
             <a:prstGeom prst="rect">
@@ -5083,7 +5170,7 @@
           </p:nvSpPr>
           <p:spPr>
             <a:xfrm>
-              <a:off x="7201663" y="5785772"/>
+              <a:off x="7191659" y="5785772"/>
               <a:ext cx="124358" cy="80101"/>
             </a:xfrm>
             <a:prstGeom prst="rect">
@@ -5222,7 +5309,7 @@
           <p:spPr>
             <a:xfrm>
               <a:off x="817517" y="1896563"/>
-              <a:ext cx="6673931" cy="82021"/>
+              <a:ext cx="6546829" cy="82021"/>
             </a:xfrm>
             <a:prstGeom prst="rect">
               <a:avLst/>
@@ -5254,7 +5341,7 @@
                   <a:latin typeface="Helvetica"/>
                   <a:cs typeface="Helvetica"/>
                 </a:rPr>
-                <a:t>HR per 10 % decline: 7.22 (0.00-Inf), p_Bonf = 1.000 (n = 6)  |  per IQR decline (Δ = 23.5 %): 104.21 (0.00-Inf)  |  IQR: [-21.0, 2.5] %</a:t>
+                <a:t>HR per 10 % decline: 1.61 (0.00-Inf), p_Bonf = 1.000 (n = 6)  |  per IQR decline (Δ = 23.7 %): 3.11 (0.00-Inf)  |  IQR: [-21.1, 2.7] %</a:t>
               </a:r>
             </a:p>
           </p:txBody>
